--- a/12/ppt/12-1_사용자_흐름으로_서비스_테스트하기_v1.pptx
+++ b/12/ppt/12-1_사용자_흐름으로_서비스_테스트하기_v1.pptx
@@ -2270,7 +2270,7 @@
                 <a:ea typeface="IBM Plex Sans KR" pitchFamily="34" charset="-122"/>
                 <a:cs typeface="IBM Plex Sans KR" pitchFamily="34" charset="-120"/>
               </a:rPr>
-              <a:t>교과서 12-1 · 20-21쪽</a:t>
+              <a:t>교과서 12-1 · 20-22쪽</a:t>
             </a:r>
             <a:endParaRPr lang="en-US" sz="900" dirty="0"/>
           </a:p>
@@ -2623,20 +2623,44 @@
           </a:p>
         </p:txBody>
       </p:sp>
-      <p:sp>
-        <p:nvSpPr>
-          <p:cNvPr id="10" name="Shape 8"/>
-          <p:cNvSpPr/>
-          <p:nvPr/>
-        </p:nvSpPr>
-        <p:spPr>
-          <a:xfrm>
-            <a:off x="530352" y="2103120"/>
-            <a:ext cx="5532120" cy="2468880"/>
+      <p:pic>
+        <p:nvPicPr>
+          <p:cNvPr id="10" name="Image 0" descr="/home/claude/w5/교과서_배포/assets/img/12-1-01-where-do-i-press.png">    </p:cNvPr>
+          <p:cNvPicPr>
+            <a:picLocks noChangeAspect="1"/>
+          </p:cNvPicPr>
+          <p:nvPr/>
+        </p:nvPicPr>
+        <p:blipFill>
+          <a:blip r:embed="rId1"/>
+          <a:stretch>
+            <a:fillRect/>
+          </a:stretch>
+        </p:blipFill>
+        <p:spPr>
+          <a:xfrm>
+            <a:off x="1307592" y="2011680"/>
+            <a:ext cx="5120640" cy="2880360"/>
+          </a:xfrm>
+          <a:prstGeom prst="rect">
+            <a:avLst/>
+          </a:prstGeom>
+        </p:spPr>
+      </p:pic>
+      <p:sp>
+        <p:nvSpPr>
+          <p:cNvPr id="11" name="Shape 8"/>
+          <p:cNvSpPr/>
+          <p:nvPr/>
+        </p:nvSpPr>
+        <p:spPr>
+          <a:xfrm>
+            <a:off x="7461504" y="2011680"/>
+            <a:ext cx="4389120" cy="1371600"/>
           </a:xfrm>
           <a:prstGeom prst="roundRect">
             <a:avLst>
-              <a:gd name="adj" fmla="val 2037"/>
+              <a:gd name="adj" fmla="val 3667"/>
             </a:avLst>
           </a:prstGeom>
           <a:solidFill>
@@ -2652,14 +2676,14 @@
       </p:sp>
       <p:sp>
         <p:nvSpPr>
-          <p:cNvPr id="11" name="Text 9"/>
-          <p:cNvSpPr/>
-          <p:nvPr/>
-        </p:nvSpPr>
-        <p:spPr>
-          <a:xfrm>
-            <a:off x="713232" y="2267712"/>
-            <a:ext cx="5166360" cy="329184"/>
+          <p:cNvPr id="12" name="Text 9"/>
+          <p:cNvSpPr/>
+          <p:nvPr/>
+        </p:nvSpPr>
+        <p:spPr>
+          <a:xfrm>
+            <a:off x="7644384" y="2176272"/>
+            <a:ext cx="4023360" cy="329184"/>
           </a:xfrm>
           <a:prstGeom prst="rect">
             <a:avLst/>
@@ -2691,14 +2715,14 @@
       </p:sp>
       <p:sp>
         <p:nvSpPr>
-          <p:cNvPr id="12" name="Text 10"/>
-          <p:cNvSpPr/>
-          <p:nvPr/>
-        </p:nvSpPr>
-        <p:spPr>
-          <a:xfrm>
-            <a:off x="713232" y="2688336"/>
-            <a:ext cx="5166360" cy="402336"/>
+          <p:cNvPr id="13" name="Text 10"/>
+          <p:cNvSpPr/>
+          <p:nvPr/>
+        </p:nvSpPr>
+        <p:spPr>
+          <a:xfrm>
+            <a:off x="7644384" y="2596896"/>
+            <a:ext cx="4023360" cy="402336"/>
           </a:xfrm>
           <a:prstGeom prst="rect">
             <a:avLst/>
@@ -2730,14 +2754,14 @@
       </p:sp>
       <p:sp>
         <p:nvSpPr>
-          <p:cNvPr id="13" name="Text 11"/>
-          <p:cNvSpPr/>
-          <p:nvPr/>
-        </p:nvSpPr>
-        <p:spPr>
-          <a:xfrm>
-            <a:off x="713232" y="3182112"/>
-            <a:ext cx="5166360" cy="1243584"/>
+          <p:cNvPr id="14" name="Text 11"/>
+          <p:cNvSpPr/>
+          <p:nvPr/>
+        </p:nvSpPr>
+        <p:spPr>
+          <a:xfrm>
+            <a:off x="7644384" y="3090672"/>
+            <a:ext cx="4023360" cy="146304"/>
           </a:xfrm>
           <a:prstGeom prst="rect">
             <a:avLst/>
@@ -2756,7 +2780,7 @@
               <a:buNone/>
             </a:pPr>
             <a:r>
-              <a:rPr lang="en-US" sz="1300" dirty="0">
+              <a:rPr lang="en-US" sz="1250" dirty="0">
                 <a:solidFill>
                   <a:srgbClr val="6C7078"/>
                 </a:solidFill>
@@ -2764,46 +2788,26 @@
                 <a:ea typeface="IBM Plex Sans KR" pitchFamily="34" charset="-122"/>
                 <a:cs typeface="IBM Plex Sans KR" pitchFamily="34" charset="-120"/>
               </a:rPr>
-              <a:t>어디를 눌러야 하는지 알고 있어서</a:t>
-            </a:r>
-            <a:endParaRPr lang="en-US" sz="1300" dirty="0"/>
-          </a:p>
-          <a:p>
-            <a:pPr indent="0" marL="0">
-              <a:lnSpc>
-                <a:spcPts val="1900"/>
-              </a:lnSpc>
-              <a:buNone/>
-            </a:pPr>
-            <a:r>
-              <a:rPr lang="en-US" sz="1300" dirty="0">
-                <a:solidFill>
-                  <a:srgbClr val="6C7078"/>
-                </a:solidFill>
-                <a:latin typeface="IBM Plex Sans KR" pitchFamily="34" charset="0"/>
-                <a:ea typeface="IBM Plex Sans KR" pitchFamily="34" charset="-122"/>
-                <a:cs typeface="IBM Plex Sans KR" pitchFamily="34" charset="-120"/>
-              </a:rPr>
-              <a:t>그것이 어렵다는 사실을 못 알아챈다.</a:t>
-            </a:r>
-            <a:endParaRPr lang="en-US" sz="1300" dirty="0"/>
-          </a:p>
-        </p:txBody>
-      </p:sp>
-      <p:sp>
-        <p:nvSpPr>
-          <p:cNvPr id="14" name="Shape 12"/>
-          <p:cNvSpPr/>
-          <p:nvPr/>
-        </p:nvSpPr>
-        <p:spPr>
-          <a:xfrm>
-            <a:off x="6318504" y="2103120"/>
-            <a:ext cx="5532120" cy="2468880"/>
+              <a:t>그래서 그것이 어렵다는 것을 못 알아챈다.</a:t>
+            </a:r>
+            <a:endParaRPr lang="en-US" sz="1250" dirty="0"/>
+          </a:p>
+        </p:txBody>
+      </p:sp>
+      <p:sp>
+        <p:nvSpPr>
+          <p:cNvPr id="15" name="Shape 12"/>
+          <p:cNvSpPr/>
+          <p:nvPr/>
+        </p:nvSpPr>
+        <p:spPr>
+          <a:xfrm>
+            <a:off x="7461504" y="3520440"/>
+            <a:ext cx="4389120" cy="1371600"/>
           </a:xfrm>
           <a:prstGeom prst="roundRect">
             <a:avLst>
-              <a:gd name="adj" fmla="val 2037"/>
+              <a:gd name="adj" fmla="val 3667"/>
             </a:avLst>
           </a:prstGeom>
           <a:solidFill>
@@ -2819,14 +2823,14 @@
       </p:sp>
       <p:sp>
         <p:nvSpPr>
-          <p:cNvPr id="15" name="Text 13"/>
-          <p:cNvSpPr/>
-          <p:nvPr/>
-        </p:nvSpPr>
-        <p:spPr>
-          <a:xfrm>
-            <a:off x="6501384" y="2267712"/>
-            <a:ext cx="5166360" cy="329184"/>
+          <p:cNvPr id="16" name="Text 13"/>
+          <p:cNvSpPr/>
+          <p:nvPr/>
+        </p:nvSpPr>
+        <p:spPr>
+          <a:xfrm>
+            <a:off x="7644384" y="3685032"/>
+            <a:ext cx="4023360" cy="329184"/>
           </a:xfrm>
           <a:prstGeom prst="rect">
             <a:avLst/>
@@ -2858,14 +2862,14 @@
       </p:sp>
       <p:sp>
         <p:nvSpPr>
-          <p:cNvPr id="16" name="Text 14"/>
-          <p:cNvSpPr/>
-          <p:nvPr/>
-        </p:nvSpPr>
-        <p:spPr>
-          <a:xfrm>
-            <a:off x="6501384" y="2688336"/>
-            <a:ext cx="5166360" cy="402336"/>
+          <p:cNvPr id="17" name="Text 14"/>
+          <p:cNvSpPr/>
+          <p:nvPr/>
+        </p:nvSpPr>
+        <p:spPr>
+          <a:xfrm>
+            <a:off x="7644384" y="4105656"/>
+            <a:ext cx="4023360" cy="402336"/>
           </a:xfrm>
           <a:prstGeom prst="rect">
             <a:avLst/>
@@ -2889,7 +2893,7 @@
                 <a:ea typeface="IBM Plex Sans KR" pitchFamily="34" charset="-122"/>
                 <a:cs typeface="IBM Plex Sans KR" pitchFamily="34" charset="-120"/>
               </a:rPr>
-              <a:t>그래서 모르는 사람인 척한다</a:t>
+              <a:t>모르는 사람인 척한다</a:t>
             </a:r>
             <a:endParaRPr lang="en-US" sz="1650" dirty="0"/>
           </a:p>
@@ -2897,14 +2901,14 @@
       </p:sp>
       <p:sp>
         <p:nvSpPr>
-          <p:cNvPr id="17" name="Text 15"/>
-          <p:cNvSpPr/>
-          <p:nvPr/>
-        </p:nvSpPr>
-        <p:spPr>
-          <a:xfrm>
-            <a:off x="6501384" y="3182112"/>
-            <a:ext cx="5166360" cy="1243584"/>
+          <p:cNvPr id="18" name="Text 15"/>
+          <p:cNvSpPr/>
+          <p:nvPr/>
+        </p:nvSpPr>
+        <p:spPr>
+          <a:xfrm>
+            <a:off x="7644384" y="4599432"/>
+            <a:ext cx="4023360" cy="146304"/>
           </a:xfrm>
           <a:prstGeom prst="rect">
             <a:avLst/>
@@ -2923,7 +2927,7 @@
               <a:buNone/>
             </a:pPr>
             <a:r>
-              <a:rPr lang="en-US" sz="1300" dirty="0">
+              <a:rPr lang="en-US" sz="1250" dirty="0">
                 <a:solidFill>
                   <a:srgbClr val="34373D"/>
                 </a:solidFill>
@@ -2931,19 +2935,38 @@
                 <a:ea typeface="IBM Plex Sans KR" pitchFamily="34" charset="-122"/>
                 <a:cs typeface="IBM Plex Sans KR" pitchFamily="34" charset="-120"/>
               </a:rPr>
-              <a:t>설명 없이 시작할 수 있는가.</a:t>
-            </a:r>
-            <a:endParaRPr lang="en-US" sz="1300" dirty="0"/>
-          </a:p>
-          <a:p>
-            <a:pPr indent="0" marL="0">
-              <a:lnSpc>
-                <a:spcPts val="1900"/>
-              </a:lnSpc>
-              <a:buNone/>
-            </a:pPr>
-            <a:r>
-              <a:rPr lang="en-US" sz="1300" dirty="0">
+              <a:t>설명 없이 시작 · 결과까지 · 막히면 다시.</a:t>
+            </a:r>
+            <a:endParaRPr lang="en-US" sz="1250" dirty="0"/>
+          </a:p>
+        </p:txBody>
+      </p:sp>
+      <p:sp>
+        <p:nvSpPr>
+          <p:cNvPr id="19" name="Text 16"/>
+          <p:cNvSpPr/>
+          <p:nvPr/>
+        </p:nvSpPr>
+        <p:spPr>
+          <a:xfrm>
+            <a:off x="530352" y="5029200"/>
+            <a:ext cx="11128248" cy="457200"/>
+          </a:xfrm>
+          <a:prstGeom prst="rect">
+            <a:avLst/>
+          </a:prstGeom>
+          <a:noFill/>
+          <a:ln/>
+        </p:spPr>
+        <p:txBody>
+          <a:bodyPr wrap="square" lIns="0" tIns="0" rIns="0" bIns="0" rtlCol="0" anchor="ctr"/>
+          <a:lstStyle/>
+          <a:p>
+            <a:pPr algn="ctr" indent="0" marL="0">
+              <a:buNone/>
+            </a:pPr>
+            <a:r>
+              <a:rPr lang="en-US" sz="1700" b="1" dirty="0">
                 <a:solidFill>
                   <a:srgbClr val="34373D"/>
                 </a:solidFill>
@@ -2951,65 +2974,6 @@
                 <a:ea typeface="IBM Plex Sans KR" pitchFamily="34" charset="-122"/>
                 <a:cs typeface="IBM Plex Sans KR" pitchFamily="34" charset="-120"/>
               </a:rPr>
-              <a:t>결과까지 갈 수 있는가.</a:t>
-            </a:r>
-            <a:endParaRPr lang="en-US" sz="1300" dirty="0"/>
-          </a:p>
-          <a:p>
-            <a:pPr indent="0" marL="0">
-              <a:lnSpc>
-                <a:spcPts val="1900"/>
-              </a:lnSpc>
-              <a:buNone/>
-            </a:pPr>
-            <a:r>
-              <a:rPr lang="en-US" sz="1300" dirty="0">
-                <a:solidFill>
-                  <a:srgbClr val="34373D"/>
-                </a:solidFill>
-                <a:latin typeface="IBM Plex Sans KR" pitchFamily="34" charset="0"/>
-                <a:ea typeface="IBM Plex Sans KR" pitchFamily="34" charset="-122"/>
-                <a:cs typeface="IBM Plex Sans KR" pitchFamily="34" charset="-120"/>
-              </a:rPr>
-              <a:t>막히면 다시 시도할 수 있는가.</a:t>
-            </a:r>
-            <a:endParaRPr lang="en-US" sz="1300" dirty="0"/>
-          </a:p>
-        </p:txBody>
-      </p:sp>
-      <p:sp>
-        <p:nvSpPr>
-          <p:cNvPr id="18" name="Text 16"/>
-          <p:cNvSpPr/>
-          <p:nvPr/>
-        </p:nvSpPr>
-        <p:spPr>
-          <a:xfrm>
-            <a:off x="530352" y="4846320"/>
-            <a:ext cx="11128248" cy="457200"/>
-          </a:xfrm>
-          <a:prstGeom prst="rect">
-            <a:avLst/>
-          </a:prstGeom>
-          <a:noFill/>
-          <a:ln/>
-        </p:spPr>
-        <p:txBody>
-          <a:bodyPr wrap="square" lIns="0" tIns="0" rIns="0" bIns="0" rtlCol="0" anchor="ctr"/>
-          <a:lstStyle/>
-          <a:p>
-            <a:pPr algn="ctr" indent="0" marL="0">
-              <a:buNone/>
-            </a:pPr>
-            <a:r>
-              <a:rPr lang="en-US" sz="1700" b="1" dirty="0">
-                <a:solidFill>
-                  <a:srgbClr val="34373D"/>
-                </a:solidFill>
-                <a:latin typeface="IBM Plex Sans KR" pitchFamily="34" charset="0"/>
-                <a:ea typeface="IBM Plex Sans KR" pitchFamily="34" charset="-122"/>
-                <a:cs typeface="IBM Plex Sans KR" pitchFamily="34" charset="-120"/>
-              </a:rPr>
               <a:t>오늘의 질문 — 내가 옆에 없어도 쓸 수 있는가</a:t>
             </a:r>
             <a:endParaRPr lang="en-US" sz="1700" dirty="0"/>
@@ -3018,7 +2982,7 @@
       </p:sp>
       <p:sp>
         <p:nvSpPr>
-          <p:cNvPr id="19" name="Shape 17"/>
+          <p:cNvPr id="20" name="Shape 17"/>
           <p:cNvSpPr/>
           <p:nvPr/>
         </p:nvSpPr>
@@ -3045,7 +3009,7 @@
       </p:sp>
       <p:sp>
         <p:nvSpPr>
-          <p:cNvPr id="20" name="Text 18"/>
+          <p:cNvPr id="21" name="Text 18"/>
           <p:cNvSpPr/>
           <p:nvPr/>
         </p:nvSpPr>
